--- a/Raw_Data_Python_Code/Presentation_Assessment # 2.pptx
+++ b/Raw_Data_Python_Code/Presentation_Assessment # 2.pptx
@@ -5,7 +5,7 @@
     <p:sldMasterId id="2147483660" r:id="rId4"/>
   </p:sldMasterIdLst>
   <p:notesMasterIdLst>
-    <p:notesMasterId r:id="rId13"/>
+    <p:notesMasterId r:id="rId14"/>
   </p:notesMasterIdLst>
   <p:sldIdLst>
     <p:sldId id="280" r:id="rId5"/>
@@ -16,6 +16,7 @@
     <p:sldId id="284" r:id="rId10"/>
     <p:sldId id="286" r:id="rId11"/>
     <p:sldId id="287" r:id="rId12"/>
+    <p:sldId id="288" r:id="rId13"/>
   </p:sldIdLst>
   <p:sldSz cx="12192000" cy="6858000"/>
   <p:notesSz cx="6858000" cy="9144000"/>
@@ -204,7 +205,7 @@
           <a:p>
             <a:fld id="{E823293E-4BB9-4AAE-824F-9F9C48BE06E4}" type="datetimeFigureOut">
               <a:rPr lang="en-AU" smtClean="0"/>
-              <a:t>9/09/2026</a:t>
+              <a:t>10/09/2026</a:t>
             </a:fld>
             <a:endParaRPr lang="en-AU"/>
           </a:p>
@@ -640,6 +641,90 @@
 </p:notes>
 </file>
 
+<file path=ppt/notesSlides/notesSlide3.xml><?xml version="1.0" encoding="utf-8"?>
+<p:notes xmlns:a="http://schemas.openxmlformats.org/drawingml/2006/main" xmlns:r="http://schemas.openxmlformats.org/officeDocument/2006/relationships" xmlns:p="http://schemas.openxmlformats.org/presentationml/2006/main">
+  <p:cSld>
+    <p:spTree>
+      <p:nvGrpSpPr>
+        <p:cNvPr id="1" name=""/>
+        <p:cNvGrpSpPr/>
+        <p:nvPr/>
+      </p:nvGrpSpPr>
+      <p:grpSpPr>
+        <a:xfrm>
+          <a:off x="0" y="0"/>
+          <a:ext cx="0" cy="0"/>
+          <a:chOff x="0" y="0"/>
+          <a:chExt cx="0" cy="0"/>
+        </a:xfrm>
+      </p:grpSpPr>
+      <p:sp>
+        <p:nvSpPr>
+          <p:cNvPr id="2" name="Slide Image Placeholder 1"/>
+          <p:cNvSpPr>
+            <a:spLocks noGrp="1" noRot="1" noChangeAspect="1"/>
+          </p:cNvSpPr>
+          <p:nvPr>
+            <p:ph type="sldImg"/>
+          </p:nvPr>
+        </p:nvSpPr>
+        <p:spPr/>
+      </p:sp>
+      <p:sp>
+        <p:nvSpPr>
+          <p:cNvPr id="3" name="Notes Placeholder 2"/>
+          <p:cNvSpPr>
+            <a:spLocks noGrp="1"/>
+          </p:cNvSpPr>
+          <p:nvPr>
+            <p:ph type="body" idx="1"/>
+          </p:nvPr>
+        </p:nvSpPr>
+        <p:spPr/>
+        <p:txBody>
+          <a:bodyPr/>
+          <a:lstStyle/>
+          <a:p>
+            <a:endParaRPr lang="en-AU" dirty="0"/>
+          </a:p>
+        </p:txBody>
+      </p:sp>
+      <p:sp>
+        <p:nvSpPr>
+          <p:cNvPr id="4" name="Slide Number Placeholder 3"/>
+          <p:cNvSpPr>
+            <a:spLocks noGrp="1"/>
+          </p:cNvSpPr>
+          <p:nvPr>
+            <p:ph type="sldNum" sz="quarter" idx="5"/>
+          </p:nvPr>
+        </p:nvSpPr>
+        <p:spPr/>
+        <p:txBody>
+          <a:bodyPr/>
+          <a:lstStyle/>
+          <a:p>
+            <a:fld id="{D824AB78-1ED6-4EF3-A712-B350E3AF3B45}" type="slidenum">
+              <a:rPr lang="en-AU" smtClean="0"/>
+              <a:t>7</a:t>
+            </a:fld>
+            <a:endParaRPr lang="en-AU"/>
+          </a:p>
+        </p:txBody>
+      </p:sp>
+    </p:spTree>
+    <p:extLst>
+      <p:ext uri="{BB962C8B-B14F-4D97-AF65-F5344CB8AC3E}">
+        <p14:creationId xmlns:p14="http://schemas.microsoft.com/office/powerpoint/2010/main" val="2208347917"/>
+      </p:ext>
+    </p:extLst>
+  </p:cSld>
+  <p:clrMapOvr>
+    <a:masterClrMapping/>
+  </p:clrMapOvr>
+</p:notes>
+</file>
+
 <file path=ppt/slideLayouts/slideLayout1.xml><?xml version="1.0" encoding="utf-8"?>
 <p:sldLayout xmlns:a="http://schemas.openxmlformats.org/drawingml/2006/main" xmlns:r="http://schemas.openxmlformats.org/officeDocument/2006/relationships" xmlns:p="http://schemas.openxmlformats.org/presentationml/2006/main" type="title" preserve="1">
   <p:cSld name="Title Slide">
@@ -825,7 +910,7 @@
           <a:p>
             <a:fld id="{88D38747-4367-4BD2-8D51-C97E202738E2}" type="datetime1">
               <a:rPr lang="en-US" smtClean="0"/>
-              <a:t>9/9/2026</a:t>
+              <a:t>9/10/2026</a:t>
             </a:fld>
             <a:endParaRPr lang="en-US" dirty="0"/>
           </a:p>
@@ -1130,7 +1215,7 @@
           <a:p>
             <a:fld id="{11F1B079-7EF0-44EE-B798-BCC497C9F3B2}" type="datetime1">
               <a:rPr lang="en-US" smtClean="0"/>
-              <a:t>9/9/2026</a:t>
+              <a:t>9/10/2026</a:t>
             </a:fld>
             <a:endParaRPr lang="en-US" dirty="0"/>
           </a:p>
@@ -1324,7 +1409,7 @@
           <a:p>
             <a:fld id="{28FF70A8-1D13-4657-95F0-A9EA54967B8D}" type="datetime1">
               <a:rPr lang="en-US" smtClean="0"/>
-              <a:t>9/9/2026</a:t>
+              <a:t>9/10/2026</a:t>
             </a:fld>
             <a:endParaRPr lang="en-US" dirty="0"/>
           </a:p>
@@ -1587,7 +1672,7 @@
           <a:p>
             <a:fld id="{21EB90AC-71BD-4C7F-8ACA-7B3F18292E63}" type="datetime1">
               <a:rPr lang="en-US" smtClean="0"/>
-              <a:t>9/9/2026</a:t>
+              <a:t>9/10/2026</a:t>
             </a:fld>
             <a:endParaRPr lang="en-US" dirty="0"/>
           </a:p>
@@ -2023,7 +2108,7 @@
           <a:p>
             <a:fld id="{4E6EFC2C-8905-46F0-B443-CE905B76BA01}" type="datetime1">
               <a:rPr lang="en-US" smtClean="0"/>
-              <a:t>9/9/2026</a:t>
+              <a:t>9/10/2026</a:t>
             </a:fld>
             <a:endParaRPr lang="en-US" dirty="0"/>
           </a:p>
@@ -2560,7 +2645,7 @@
           <a:p>
             <a:fld id="{D9079DC3-C9B5-499E-9140-0DC28B7074E2}" type="datetime1">
               <a:rPr lang="en-US" smtClean="0"/>
-              <a:t>9/9/2026</a:t>
+              <a:t>9/10/2026</a:t>
             </a:fld>
             <a:endParaRPr lang="en-US" dirty="0"/>
           </a:p>
@@ -3442,7 +3527,7 @@
           <a:p>
             <a:fld id="{30BB33EA-E472-4D22-9C03-A9C14AA21CED}" type="datetime1">
               <a:rPr lang="en-US" smtClean="0"/>
-              <a:t>9/9/2026</a:t>
+              <a:t>9/10/2026</a:t>
             </a:fld>
             <a:endParaRPr lang="en-US" dirty="0"/>
           </a:p>
@@ -3612,7 +3697,7 @@
           <a:p>
             <a:fld id="{73C55A3C-5767-4844-A0A3-83778C2E5409}" type="datetime1">
               <a:rPr lang="en-US" smtClean="0"/>
-              <a:t>9/9/2026</a:t>
+              <a:t>9/10/2026</a:t>
             </a:fld>
             <a:endParaRPr lang="en-US" dirty="0"/>
           </a:p>
@@ -3856,7 +3941,7 @@
           <a:p>
             <a:fld id="{CAE507A8-A5CF-4D38-AB86-7EDDA87A85D4}" type="datetime1">
               <a:rPr lang="en-US" smtClean="0"/>
-              <a:t>9/9/2026</a:t>
+              <a:t>9/10/2026</a:t>
             </a:fld>
             <a:endParaRPr lang="en-US" dirty="0"/>
           </a:p>
@@ -4098,7 +4183,7 @@
           <a:p>
             <a:fld id="{BDFCD27C-8599-43EF-BA1D-14DDC1946E06}" type="datetime1">
               <a:rPr lang="en-US" smtClean="0"/>
-              <a:t>9/9/2026</a:t>
+              <a:t>9/10/2026</a:t>
             </a:fld>
             <a:endParaRPr lang="en-US" dirty="0"/>
           </a:p>
@@ -4581,7 +4666,7 @@
           <a:p>
             <a:fld id="{49343D99-809A-49C0-96E5-4250D0B498EE}" type="datetime1">
               <a:rPr lang="en-US" smtClean="0"/>
-              <a:t>9/9/2026</a:t>
+              <a:t>9/10/2026</a:t>
             </a:fld>
             <a:endParaRPr lang="en-US" dirty="0"/>
           </a:p>
@@ -4699,7 +4784,7 @@
           <a:p>
             <a:fld id="{A143DE9B-B678-4EFB-BB7D-A4370204A0B0}" type="datetime1">
               <a:rPr lang="en-US" smtClean="0"/>
-              <a:t>9/9/2026</a:t>
+              <a:t>9/10/2026</a:t>
             </a:fld>
             <a:endParaRPr lang="en-US" dirty="0"/>
           </a:p>
@@ -4794,7 +4879,7 @@
           <a:p>
             <a:fld id="{E68812DA-F765-4142-A6A3-A8ED7235E082}" type="datetime1">
               <a:rPr lang="en-US" smtClean="0"/>
-              <a:t>9/9/2026</a:t>
+              <a:t>9/10/2026</a:t>
             </a:fld>
             <a:endParaRPr lang="en-US" dirty="0"/>
           </a:p>
@@ -5049,7 +5134,7 @@
           <a:p>
             <a:fld id="{3E0277FD-7DE6-41D4-930D-AC99F5AFE54E}" type="datetime1">
               <a:rPr lang="en-US" smtClean="0"/>
-              <a:t>9/9/2026</a:t>
+              <a:t>9/10/2026</a:t>
             </a:fld>
             <a:endParaRPr lang="en-US" dirty="0"/>
           </a:p>
@@ -5356,7 +5441,7 @@
           <a:p>
             <a:fld id="{9EA15526-7079-4B7B-987C-1B5FAE11A0FF}" type="datetime1">
               <a:rPr lang="en-US" smtClean="0"/>
-              <a:t>9/9/2026</a:t>
+              <a:t>9/10/2026</a:t>
             </a:fld>
             <a:endParaRPr lang="en-US" dirty="0"/>
           </a:p>
@@ -5591,7 +5676,7 @@
           <a:p>
             <a:fld id="{073ED0CC-082F-4160-86E5-0D6041F12778}" type="datetime1">
               <a:rPr lang="en-US" smtClean="0"/>
-              <a:t>9/9/2026</a:t>
+              <a:t>9/10/2026</a:t>
             </a:fld>
             <a:endParaRPr lang="en-US" dirty="0"/>
           </a:p>
@@ -8260,7 +8345,7 @@
     <p:bg>
       <p:bgPr>
         <a:blipFill rotWithShape="1">
-          <a:blip r:embed="rId2">
+          <a:blip r:embed="rId3">
             <a:duotone>
               <a:schemeClr val="bg1">
                 <a:shade val="80000"/>
@@ -8368,7 +8453,7 @@
         </p:nvSpPr>
         <p:spPr>
           <a:xfrm>
-            <a:off x="913795" y="965196"/>
+            <a:off x="1061560" y="3396980"/>
             <a:ext cx="3153952" cy="1329769"/>
           </a:xfrm>
         </p:spPr>
@@ -8380,10 +8465,10 @@
           <a:p>
             <a:pPr algn="l"/>
             <a:r>
-              <a:rPr lang="en-US" sz="2800"/>
+              <a:rPr lang="en-US" sz="2800" dirty="0"/>
               <a:t>Distribution of goal scorer young vs old.</a:t>
             </a:r>
-            <a:endParaRPr lang="en-AU" sz="2800"/>
+            <a:endParaRPr lang="en-AU" sz="2800" dirty="0"/>
           </a:p>
         </p:txBody>
       </p:sp>
@@ -8469,7 +8554,7 @@
           <p:nvPr/>
         </p:nvPicPr>
         <p:blipFill>
-          <a:blip r:embed="rId3"/>
+          <a:blip r:embed="rId4"/>
           <a:stretch>
             <a:fillRect/>
           </a:stretch>
@@ -8484,6 +8569,141 @@
           </a:prstGeom>
         </p:spPr>
       </p:pic>
+      <p:sp>
+        <p:nvSpPr>
+          <p:cNvPr id="3" name="Title 1">
+            <a:extLst>
+              <a:ext uri="{FF2B5EF4-FFF2-40B4-BE49-F238E27FC236}">
+                <a16:creationId xmlns:a16="http://schemas.microsoft.com/office/drawing/2014/main" id="{DEC20C31-DFB0-C474-8AB9-18CD8631E990}"/>
+              </a:ext>
+            </a:extLst>
+          </p:cNvPr>
+          <p:cNvSpPr txBox="1">
+            <a:spLocks/>
+          </p:cNvSpPr>
+          <p:nvPr/>
+        </p:nvSpPr>
+        <p:spPr>
+          <a:xfrm>
+            <a:off x="1061560" y="1120813"/>
+            <a:ext cx="3153952" cy="1329769"/>
+          </a:xfrm>
+          <a:prstGeom prst="rect">
+            <a:avLst/>
+          </a:prstGeom>
+          <a:effectLst>
+            <a:outerShdw blurRad="25400" dir="17880000">
+              <a:srgbClr val="000000">
+                <a:alpha val="46000"/>
+              </a:srgbClr>
+            </a:outerShdw>
+          </a:effectLst>
+        </p:spPr>
+        <p:txBody>
+          <a:bodyPr vert="horz" lIns="91440" tIns="45720" rIns="91440" bIns="45720" rtlCol="0" anchor="ctr">
+            <a:normAutofit/>
+          </a:bodyPr>
+          <a:lstStyle>
+            <a:lvl1pPr algn="ctr" defTabSz="457200" rtl="0" eaLnBrk="1" latinLnBrk="0" hangingPunct="1">
+              <a:lnSpc>
+                <a:spcPct val="90000"/>
+              </a:lnSpc>
+              <a:spcBef>
+                <a:spcPct val="0"/>
+              </a:spcBef>
+              <a:buNone/>
+              <a:defRPr sz="4600" kern="1200">
+                <a:ln>
+                  <a:solidFill>
+                    <a:schemeClr val="bg1">
+                      <a:lumMod val="75000"/>
+                      <a:lumOff val="25000"/>
+                      <a:alpha val="10000"/>
+                    </a:schemeClr>
+                  </a:solidFill>
+                </a:ln>
+                <a:solidFill>
+                  <a:schemeClr val="tx2"/>
+                </a:solidFill>
+                <a:effectLst>
+                  <a:outerShdw blurRad="9525" dist="25400" dir="14640000" algn="tl" rotWithShape="0">
+                    <a:schemeClr val="bg1">
+                      <a:alpha val="30000"/>
+                    </a:schemeClr>
+                  </a:outerShdw>
+                </a:effectLst>
+                <a:latin typeface="+mj-lt"/>
+                <a:ea typeface="+mj-ea"/>
+                <a:cs typeface="Trebuchet MS"/>
+              </a:defRPr>
+            </a:lvl1pPr>
+            <a:lvl2pPr eaLnBrk="1" hangingPunct="1">
+              <a:defRPr>
+                <a:solidFill>
+                  <a:schemeClr val="tx2"/>
+                </a:solidFill>
+              </a:defRPr>
+            </a:lvl2pPr>
+            <a:lvl3pPr eaLnBrk="1" hangingPunct="1">
+              <a:defRPr>
+                <a:solidFill>
+                  <a:schemeClr val="tx2"/>
+                </a:solidFill>
+              </a:defRPr>
+            </a:lvl3pPr>
+            <a:lvl4pPr eaLnBrk="1" hangingPunct="1">
+              <a:defRPr>
+                <a:solidFill>
+                  <a:schemeClr val="tx2"/>
+                </a:solidFill>
+              </a:defRPr>
+            </a:lvl4pPr>
+            <a:lvl5pPr eaLnBrk="1" hangingPunct="1">
+              <a:defRPr>
+                <a:solidFill>
+                  <a:schemeClr val="tx2"/>
+                </a:solidFill>
+              </a:defRPr>
+            </a:lvl5pPr>
+            <a:lvl6pPr eaLnBrk="1" hangingPunct="1">
+              <a:defRPr>
+                <a:solidFill>
+                  <a:schemeClr val="tx2"/>
+                </a:solidFill>
+              </a:defRPr>
+            </a:lvl6pPr>
+            <a:lvl7pPr eaLnBrk="1" hangingPunct="1">
+              <a:defRPr>
+                <a:solidFill>
+                  <a:schemeClr val="tx2"/>
+                </a:solidFill>
+              </a:defRPr>
+            </a:lvl7pPr>
+            <a:lvl8pPr eaLnBrk="1" hangingPunct="1">
+              <a:defRPr>
+                <a:solidFill>
+                  <a:schemeClr val="tx2"/>
+                </a:solidFill>
+              </a:defRPr>
+            </a:lvl8pPr>
+            <a:lvl9pPr eaLnBrk="1" hangingPunct="1">
+              <a:defRPr>
+                <a:solidFill>
+                  <a:schemeClr val="tx2"/>
+                </a:solidFill>
+              </a:defRPr>
+            </a:lvl9pPr>
+          </a:lstStyle>
+          <a:p>
+            <a:pPr algn="l"/>
+            <a:r>
+              <a:rPr lang="en-US" sz="2800" dirty="0"/>
+              <a:t>Histogram</a:t>
+            </a:r>
+            <a:endParaRPr lang="en-AU" sz="2800" dirty="0"/>
+          </a:p>
+        </p:txBody>
+      </p:sp>
     </p:spTree>
     <p:extLst>
       <p:ext uri="{BB962C8B-B14F-4D97-AF65-F5344CB8AC3E}">
@@ -8612,6 +8832,92 @@
     <p:extLst>
       <p:ext uri="{BB962C8B-B14F-4D97-AF65-F5344CB8AC3E}">
         <p14:creationId xmlns:p14="http://schemas.microsoft.com/office/powerpoint/2010/main" val="2715343993"/>
+      </p:ext>
+    </p:extLst>
+  </p:cSld>
+  <p:clrMapOvr>
+    <a:masterClrMapping/>
+  </p:clrMapOvr>
+</p:sld>
+</file>
+
+<file path=ppt/slides/slide9.xml><?xml version="1.0" encoding="utf-8"?>
+<p:sld xmlns:a="http://schemas.openxmlformats.org/drawingml/2006/main" xmlns:r="http://schemas.openxmlformats.org/officeDocument/2006/relationships" xmlns:p="http://schemas.openxmlformats.org/presentationml/2006/main">
+  <p:cSld>
+    <p:spTree>
+      <p:nvGrpSpPr>
+        <p:cNvPr id="1" name=""/>
+        <p:cNvGrpSpPr/>
+        <p:nvPr/>
+      </p:nvGrpSpPr>
+      <p:grpSpPr>
+        <a:xfrm>
+          <a:off x="0" y="0"/>
+          <a:ext cx="0" cy="0"/>
+          <a:chOff x="0" y="0"/>
+          <a:chExt cx="0" cy="0"/>
+        </a:xfrm>
+      </p:grpSpPr>
+      <p:sp>
+        <p:nvSpPr>
+          <p:cNvPr id="2" name="Title 1">
+            <a:extLst>
+              <a:ext uri="{FF2B5EF4-FFF2-40B4-BE49-F238E27FC236}">
+                <a16:creationId xmlns:a16="http://schemas.microsoft.com/office/drawing/2014/main" id="{2D575335-AB58-D2AA-BA39-3B5C5CC7F7D0}"/>
+              </a:ext>
+            </a:extLst>
+          </p:cNvPr>
+          <p:cNvSpPr>
+            <a:spLocks noGrp="1"/>
+          </p:cNvSpPr>
+          <p:nvPr>
+            <p:ph type="title"/>
+          </p:nvPr>
+        </p:nvSpPr>
+        <p:spPr/>
+        <p:txBody>
+          <a:bodyPr/>
+          <a:lstStyle/>
+          <a:p>
+            <a:r>
+              <a:rPr lang="en-AU" dirty="0"/>
+              <a:t>Conclusion </a:t>
+            </a:r>
+          </a:p>
+        </p:txBody>
+      </p:sp>
+      <p:sp>
+        <p:nvSpPr>
+          <p:cNvPr id="3" name="Content Placeholder 2">
+            <a:extLst>
+              <a:ext uri="{FF2B5EF4-FFF2-40B4-BE49-F238E27FC236}">
+                <a16:creationId xmlns:a16="http://schemas.microsoft.com/office/drawing/2014/main" id="{5F620440-B550-5C51-FE7F-D01E45087530}"/>
+              </a:ext>
+            </a:extLst>
+          </p:cNvPr>
+          <p:cNvSpPr>
+            <a:spLocks noGrp="1"/>
+          </p:cNvSpPr>
+          <p:nvPr>
+            <p:ph idx="1"/>
+          </p:nvPr>
+        </p:nvSpPr>
+        <p:spPr/>
+        <p:txBody>
+          <a:bodyPr/>
+          <a:lstStyle/>
+          <a:p>
+            <a:r>
+              <a:rPr lang="en-AU" dirty="0"/>
+              <a:t>Using different statistical method helped me learn</a:t>
+            </a:r>
+          </a:p>
+        </p:txBody>
+      </p:sp>
+    </p:spTree>
+    <p:extLst>
+      <p:ext uri="{BB962C8B-B14F-4D97-AF65-F5344CB8AC3E}">
+        <p14:creationId xmlns:p14="http://schemas.microsoft.com/office/powerpoint/2010/main" val="1015139800"/>
       </p:ext>
     </p:extLst>
   </p:cSld>
